--- a/courses/build/teach-the-teachers/T-D1.zu.pptx
+++ b/courses/build/teach-the-teachers/T-D1.zu.pptx
@@ -1872,7 +1872,7 @@
           </a:p>
           <a:p>
             <a:r>
-              <a:t>Clip T-ANI-12: public/course-animations/intro-permaculture/watch-13-diversity.mp4</a:t>
+              <a:t>Clip T-ANI-12: public/course-media/teach-the-teachers/T-ANI-12.mp4</a:t>
             </a:r>
           </a:p>
         </p:txBody>
@@ -12693,49 +12693,27 @@
           </a:p>
         </p:txBody>
       </p:sp>
-      <p:pic>
-        <p:nvPicPr>
-          <p:cNvPr id="7" name="Picture 6" descr="watch-13-diversity.jpg"/>
-          <p:cNvPicPr>
-            <a:picLocks noChangeAspect="1"/>
-          </p:cNvPicPr>
-          <p:nvPr/>
-        </p:nvPicPr>
-        <p:blipFill>
-          <a:blip r:embed="rId2"/>
-          <a:stretch>
-            <a:fillRect/>
-          </a:stretch>
-        </p:blipFill>
-        <p:spPr>
-          <a:xfrm>
-            <a:off x="5852160" y="2308860"/>
-            <a:ext cx="5852160" cy="3291840"/>
-          </a:xfrm>
-          <a:prstGeom prst="rect">
-            <a:avLst/>
-          </a:prstGeom>
-        </p:spPr>
-      </p:pic>
-      <p:sp>
-        <p:nvSpPr>
-          <p:cNvPr id="8" name="Rectangle 7"/>
+      <p:sp>
+        <p:nvSpPr>
+          <p:cNvPr id="7" name="Rectangle 6"/>
           <p:cNvSpPr/>
           <p:nvPr/>
         </p:nvSpPr>
         <p:spPr>
           <a:xfrm>
-            <a:off x="5852160" y="5806440"/>
-            <a:ext cx="5852160" cy="411480"/>
+            <a:off x="5852160" y="1691640"/>
+            <a:ext cx="5852160" cy="4526280"/>
           </a:xfrm>
           <a:prstGeom prst="rect">
             <a:avLst/>
           </a:prstGeom>
           <a:solidFill>
-            <a:srgbClr val="1C1C1C"/>
+            <a:srgbClr val="C9A77C"/>
           </a:solidFill>
-          <a:ln>
-            <a:noFill/>
+          <a:ln w="15875">
+            <a:solidFill>
+              <a:srgbClr val="2C6FB7"/>
+            </a:solidFill>
           </a:ln>
           <a:effectLst/>
         </p:spPr>
@@ -12763,14 +12741,53 @@
       </p:sp>
       <p:sp>
         <p:nvSpPr>
+          <p:cNvPr id="8" name="TextBox 7"/>
+          <p:cNvSpPr txBox="1"/>
+          <p:nvPr/>
+        </p:nvSpPr>
+        <p:spPr>
+          <a:xfrm>
+            <a:off x="6080760" y="1874520"/>
+            <a:ext cx="5394960" cy="365760"/>
+          </a:xfrm>
+          <a:prstGeom prst="rect">
+            <a:avLst/>
+          </a:prstGeom>
+          <a:noFill/>
+        </p:spPr>
+        <p:txBody>
+          <a:bodyPr wrap="square" anchor="t" lIns="45720" rIns="45720">
+            <a:spAutoFit/>
+          </a:bodyPr>
+          <a:lstStyle/>
+          <a:p>
+            <a:pPr algn="l">
+              <a:spcAft>
+                <a:spcPts val="800"/>
+              </a:spcAft>
+            </a:pPr>
+            <a:r>
+              <a:rPr sz="1200" b="1">
+                <a:solidFill>
+                  <a:srgbClr val="D2452C"/>
+                </a:solidFill>
+                <a:latin typeface="Trebuchet MS"/>
+              </a:rPr>
+              <a:t>ANIMATION · T-ANI-12 · coming</a:t>
+            </a:r>
+          </a:p>
+        </p:txBody>
+      </p:sp>
+      <p:sp>
+        <p:nvSpPr>
           <p:cNvPr id="9" name="TextBox 8"/>
           <p:cNvSpPr txBox="1"/>
           <p:nvPr/>
         </p:nvSpPr>
         <p:spPr>
           <a:xfrm>
-            <a:off x="5943600" y="5815584"/>
-            <a:ext cx="5669280" cy="384048"/>
+            <a:off x="6080760" y="2258568"/>
+            <a:ext cx="5394960" cy="457200"/>
           </a:xfrm>
           <a:prstGeom prst="rect">
             <a:avLst/>
@@ -12778,7 +12795,7 @@
           <a:noFill/>
         </p:spPr>
         <p:txBody>
-          <a:bodyPr wrap="square" anchor="ctr" lIns="45720" rIns="45720">
+          <a:bodyPr wrap="square" anchor="t" lIns="45720" rIns="45720">
             <a:spAutoFit/>
           </a:bodyPr>
           <a:lstStyle/>
@@ -12789,13 +12806,52 @@
               </a:spcAft>
             </a:pPr>
             <a:r>
+              <a:rPr sz="1800" b="1">
+                <a:solidFill>
+                  <a:srgbClr val="1C1C1C"/>
+                </a:solidFill>
+                <a:latin typeface="Segoe Print"/>
+              </a:rPr>
+              <a:t>Diversity</a:t>
+            </a:r>
+          </a:p>
+        </p:txBody>
+      </p:sp>
+      <p:sp>
+        <p:nvSpPr>
+          <p:cNvPr id="10" name="TextBox 9"/>
+          <p:cNvSpPr txBox="1"/>
+          <p:nvPr/>
+        </p:nvSpPr>
+        <p:spPr>
+          <a:xfrm>
+            <a:off x="6080760" y="2788920"/>
+            <a:ext cx="5394960" cy="3246120"/>
+          </a:xfrm>
+          <a:prstGeom prst="rect">
+            <a:avLst/>
+          </a:prstGeom>
+          <a:noFill/>
+        </p:spPr>
+        <p:txBody>
+          <a:bodyPr wrap="square" anchor="t" lIns="45720" rIns="45720">
+            <a:spAutoFit/>
+          </a:bodyPr>
+          <a:lstStyle/>
+          <a:p>
+            <a:pPr algn="l">
+              <a:spcAft>
+                <a:spcPts val="800"/>
+              </a:spcAft>
+            </a:pPr>
+            <a:r>
               <a:rPr sz="1100" b="0">
                 <a:solidFill>
-                  <a:srgbClr val="C9A77C"/>
+                  <a:srgbClr val="1C1C1C"/>
                 </a:solidFill>
                 <a:latin typeface="Trebuchet MS"/>
               </a:rPr>
-              <a:t>▶  Clip T-ANI-12 · play from the tablet: watch-13-diversity.mp4</a:t>
+              <a:t>A bare row of a single crop wilts as pests arrive; beside it a mixed bed (tall grain, climbing bean, spreading pumpkin-like leaves, flowers) stays green while ladybirds and birds visit. Seasons pass and the mixed bed keeps producing. (Replaces the withdrawn clip `intro-permaculture/watch-13-diversity.mp4`.)</a:t>
             </a:r>
           </a:p>
         </p:txBody>
